--- a/slides/6-sampling.pptx
+++ b/slides/6-sampling.pptx
@@ -593,7 +593,7 @@
           <a:p>
             <a:fld id="{8CF15C98-C603-7C4D-997E-2B4A9996FEBD}" type="datetimeFigureOut">
               <a:rPr lang="en-US" smtClean="0"/>
-              <a:t>5/7/26</a:t>
+              <a:t>5/8/26</a:t>
             </a:fld>
             <a:endParaRPr lang="en-US"/>
           </a:p>
@@ -1261,6 +1261,141 @@
 </p:notes>
 </file>
 
+<file path=ppt/notesSlides/notesSlide4.xml><?xml version="1.0" encoding="utf-8"?>
+<p:notes xmlns:a="http://schemas.openxmlformats.org/drawingml/2006/main" xmlns:r="http://schemas.openxmlformats.org/officeDocument/2006/relationships" xmlns:p="http://schemas.openxmlformats.org/presentationml/2006/main">
+  <p:cSld>
+    <p:spTree>
+      <p:nvGrpSpPr>
+        <p:cNvPr id="1" name=""/>
+        <p:cNvGrpSpPr/>
+        <p:nvPr/>
+      </p:nvGrpSpPr>
+      <p:grpSpPr>
+        <a:xfrm>
+          <a:off x="0" y="0"/>
+          <a:ext cx="0" cy="0"/>
+          <a:chOff x="0" y="0"/>
+          <a:chExt cx="0" cy="0"/>
+        </a:xfrm>
+      </p:grpSpPr>
+      <p:sp>
+        <p:nvSpPr>
+          <p:cNvPr id="2" name="Slide Image Placeholder 1"/>
+          <p:cNvSpPr>
+            <a:spLocks noGrp="1" noRot="1" noChangeAspect="1"/>
+          </p:cNvSpPr>
+          <p:nvPr>
+            <p:ph type="sldImg"/>
+          </p:nvPr>
+        </p:nvSpPr>
+        <p:spPr/>
+      </p:sp>
+      <p:sp>
+        <p:nvSpPr>
+          <p:cNvPr id="3" name="Notes Placeholder 2"/>
+          <p:cNvSpPr>
+            <a:spLocks noGrp="1"/>
+          </p:cNvSpPr>
+          <p:nvPr>
+            <p:ph type="body" idx="1"/>
+          </p:nvPr>
+        </p:nvSpPr>
+        <p:spPr/>
+        <p:txBody>
+          <a:bodyPr/>
+          <a:lstStyle/>
+          <a:p>
+            <a:r>
+              <a:rPr lang="en-US" dirty="0"/>
+              <a:t>[TIMINGS]</a:t>
+            </a:r>
+          </a:p>
+          <a:p>
+            <a:endParaRPr lang="en-US" dirty="0"/>
+          </a:p>
+          <a:p>
+            <a:r>
+              <a:rPr lang="en-US" dirty="0"/>
+              <a:t>Practice: 40m</a:t>
+            </a:r>
+          </a:p>
+          <a:p>
+            <a:r>
+              <a:rPr lang="en-US" dirty="0"/>
+              <a:t>Target: 45m</a:t>
+            </a:r>
+          </a:p>
+          <a:p>
+            <a:endParaRPr lang="en-US" dirty="0"/>
+          </a:p>
+          <a:p>
+            <a:r>
+              <a:rPr lang="en-US" dirty="0"/>
+              <a:t>Start time: 14:45</a:t>
+            </a:r>
+          </a:p>
+          <a:p>
+            <a:r>
+              <a:rPr lang="en-US" dirty="0"/>
+              <a:t>End time: 15:00</a:t>
+            </a:r>
+          </a:p>
+          <a:p>
+            <a:r>
+              <a:rPr lang="en-US" dirty="0"/>
+              <a:t>(BREAK UNTIL 15:30)</a:t>
+            </a:r>
+          </a:p>
+          <a:p>
+            <a:r>
+              <a:rPr lang="en-US" dirty="0"/>
+              <a:t>Finish time: 16:00</a:t>
+            </a:r>
+          </a:p>
+          <a:p>
+            <a:r>
+              <a:rPr lang="en-US" dirty="0"/>
+              <a:t>---</a:t>
+            </a:r>
+          </a:p>
+        </p:txBody>
+      </p:sp>
+      <p:sp>
+        <p:nvSpPr>
+          <p:cNvPr id="4" name="Slide Number Placeholder 3"/>
+          <p:cNvSpPr>
+            <a:spLocks noGrp="1"/>
+          </p:cNvSpPr>
+          <p:nvPr>
+            <p:ph type="sldNum" sz="quarter" idx="5"/>
+          </p:nvPr>
+        </p:nvSpPr>
+        <p:spPr/>
+        <p:txBody>
+          <a:bodyPr/>
+          <a:lstStyle/>
+          <a:p>
+            <a:fld id="{AC8802D9-2461-2B4C-ADAF-E58436D37475}" type="slidenum">
+              <a:rPr lang="en-US" smtClean="0"/>
+              <a:t>26</a:t>
+            </a:fld>
+            <a:endParaRPr lang="en-US"/>
+          </a:p>
+        </p:txBody>
+      </p:sp>
+    </p:spTree>
+    <p:extLst>
+      <p:ext uri="{BB962C8B-B14F-4D97-AF65-F5344CB8AC3E}">
+        <p14:creationId xmlns:p14="http://schemas.microsoft.com/office/powerpoint/2010/main" val="3172082352"/>
+      </p:ext>
+    </p:extLst>
+  </p:cSld>
+  <p:clrMapOvr>
+    <a:masterClrMapping/>
+  </p:clrMapOvr>
+</p:notes>
+</file>
+
 <file path=ppt/slideLayouts/slideLayout1.xml><?xml version="1.0" encoding="utf-8"?>
 <p:sldLayout xmlns:a="http://schemas.openxmlformats.org/drawingml/2006/main" xmlns:r="http://schemas.openxmlformats.org/officeDocument/2006/relationships" xmlns:p="http://schemas.openxmlformats.org/presentationml/2006/main" type="title" preserve="1">
   <p:cSld name="Title Slide">
@@ -1392,7 +1527,7 @@
           <a:p>
             <a:fld id="{846CE7D5-CF57-46EF-B807-FDD0502418D4}" type="datetimeFigureOut">
               <a:rPr lang="en-GB" smtClean="0"/>
-              <a:t>07/05/2026</a:t>
+              <a:t>08/05/2026</a:t>
             </a:fld>
             <a:endParaRPr lang="en-GB"/>
           </a:p>
@@ -1562,7 +1697,7 @@
           <a:p>
             <a:fld id="{846CE7D5-CF57-46EF-B807-FDD0502418D4}" type="datetimeFigureOut">
               <a:rPr lang="en-GB" smtClean="0"/>
-              <a:t>07/05/2026</a:t>
+              <a:t>08/05/2026</a:t>
             </a:fld>
             <a:endParaRPr lang="en-GB"/>
           </a:p>
@@ -1742,7 +1877,7 @@
           <a:p>
             <a:fld id="{846CE7D5-CF57-46EF-B807-FDD0502418D4}" type="datetimeFigureOut">
               <a:rPr lang="en-GB" smtClean="0"/>
-              <a:t>07/05/2026</a:t>
+              <a:t>08/05/2026</a:t>
             </a:fld>
             <a:endParaRPr lang="en-GB"/>
           </a:p>
@@ -1912,7 +2047,7 @@
           <a:p>
             <a:fld id="{846CE7D5-CF57-46EF-B807-FDD0502418D4}" type="datetimeFigureOut">
               <a:rPr lang="en-GB" smtClean="0"/>
-              <a:t>07/05/2026</a:t>
+              <a:t>08/05/2026</a:t>
             </a:fld>
             <a:endParaRPr lang="en-GB"/>
           </a:p>
@@ -2158,7 +2293,7 @@
           <a:p>
             <a:fld id="{846CE7D5-CF57-46EF-B807-FDD0502418D4}" type="datetimeFigureOut">
               <a:rPr lang="en-GB" smtClean="0"/>
-              <a:t>07/05/2026</a:t>
+              <a:t>08/05/2026</a:t>
             </a:fld>
             <a:endParaRPr lang="en-GB"/>
           </a:p>
@@ -2390,7 +2525,7 @@
           <a:p>
             <a:fld id="{846CE7D5-CF57-46EF-B807-FDD0502418D4}" type="datetimeFigureOut">
               <a:rPr lang="en-GB" smtClean="0"/>
-              <a:t>07/05/2026</a:t>
+              <a:t>08/05/2026</a:t>
             </a:fld>
             <a:endParaRPr lang="en-GB"/>
           </a:p>
@@ -2757,7 +2892,7 @@
           <a:p>
             <a:fld id="{846CE7D5-CF57-46EF-B807-FDD0502418D4}" type="datetimeFigureOut">
               <a:rPr lang="en-GB" smtClean="0"/>
-              <a:t>07/05/2026</a:t>
+              <a:t>08/05/2026</a:t>
             </a:fld>
             <a:endParaRPr lang="en-GB"/>
           </a:p>
@@ -2875,7 +3010,7 @@
           <a:p>
             <a:fld id="{846CE7D5-CF57-46EF-B807-FDD0502418D4}" type="datetimeFigureOut">
               <a:rPr lang="en-GB" smtClean="0"/>
-              <a:t>07/05/2026</a:t>
+              <a:t>08/05/2026</a:t>
             </a:fld>
             <a:endParaRPr lang="en-GB"/>
           </a:p>
@@ -2970,7 +3105,7 @@
           <a:p>
             <a:fld id="{846CE7D5-CF57-46EF-B807-FDD0502418D4}" type="datetimeFigureOut">
               <a:rPr lang="en-GB" smtClean="0"/>
-              <a:t>07/05/2026</a:t>
+              <a:t>08/05/2026</a:t>
             </a:fld>
             <a:endParaRPr lang="en-GB"/>
           </a:p>
@@ -3247,7 +3382,7 @@
           <a:p>
             <a:fld id="{846CE7D5-CF57-46EF-B807-FDD0502418D4}" type="datetimeFigureOut">
               <a:rPr lang="en-GB" smtClean="0"/>
-              <a:t>07/05/2026</a:t>
+              <a:t>08/05/2026</a:t>
             </a:fld>
             <a:endParaRPr lang="en-GB"/>
           </a:p>
@@ -3504,7 +3639,7 @@
           <a:p>
             <a:fld id="{846CE7D5-CF57-46EF-B807-FDD0502418D4}" type="datetimeFigureOut">
               <a:rPr lang="en-GB" smtClean="0"/>
-              <a:t>07/05/2026</a:t>
+              <a:t>08/05/2026</a:t>
             </a:fld>
             <a:endParaRPr lang="en-GB"/>
           </a:p>
@@ -3717,7 +3852,7 @@
           <a:p>
             <a:fld id="{846CE7D5-CF57-46EF-B807-FDD0502418D4}" type="datetimeFigureOut">
               <a:rPr lang="en-GB" smtClean="0"/>
-              <a:t>07/05/2026</a:t>
+              <a:t>08/05/2026</a:t>
             </a:fld>
             <a:endParaRPr lang="en-GB"/>
           </a:p>
@@ -7033,7 +7168,7 @@
           <p:nvPr>
             <p:extLst>
               <p:ext uri="{D42A27DB-BD31-4B8C-83A1-F6EECF244321}">
-                <p14:modId xmlns:p14="http://schemas.microsoft.com/office/powerpoint/2010/main" val="2210232523"/>
+                <p14:modId xmlns:p14="http://schemas.microsoft.com/office/powerpoint/2010/main" val="3674542651"/>
               </p:ext>
             </p:extLst>
           </p:nvPr>
@@ -7088,8 +7223,8 @@
                     <a:p>
                       <a:pPr algn="ctr"/>
                       <a:r>
-                        <a:rPr lang="en-GB"/>
-                        <a:t>0.34</a:t>
+                        <a:rPr lang="en-GB" dirty="0"/>
+                        <a:t>0.57</a:t>
                       </a:r>
                     </a:p>
                   </a:txBody>
@@ -7125,8 +7260,8 @@
                     <a:p>
                       <a:pPr algn="ctr"/>
                       <a:r>
-                        <a:rPr lang="en-GB"/>
-                        <a:t>1.26</a:t>
+                        <a:rPr lang="en-GB" dirty="0"/>
+                        <a:t>-0.98</a:t>
                       </a:r>
                     </a:p>
                   </a:txBody>
@@ -7162,8 +7297,8 @@
                     <a:p>
                       <a:pPr algn="ctr"/>
                       <a:r>
-                        <a:rPr lang="en-GB"/>
-                        <a:t>-0.01</a:t>
+                        <a:rPr lang="en-GB" dirty="0"/>
+                        <a:t>0.08</a:t>
                       </a:r>
                     </a:p>
                   </a:txBody>
@@ -7199,8 +7334,8 @@
                     <a:p>
                       <a:pPr algn="ctr"/>
                       <a:r>
-                        <a:rPr lang="en-GB"/>
-                        <a:t>0.04</a:t>
+                        <a:rPr lang="en-GB" dirty="0"/>
+                        <a:t>-0.02</a:t>
                       </a:r>
                     </a:p>
                   </a:txBody>
@@ -7236,8 +7371,8 @@
                     <a:p>
                       <a:pPr algn="ctr"/>
                       <a:r>
-                        <a:rPr lang="en-GB"/>
-                        <a:t>-0.98</a:t>
+                        <a:rPr lang="en-GB" dirty="0"/>
+                        <a:t>1.32</a:t>
                       </a:r>
                     </a:p>
                   </a:txBody>
@@ -7273,8 +7408,8 @@
                     <a:p>
                       <a:pPr algn="ctr"/>
                       <a:r>
-                        <a:rPr lang="en-GB"/>
-                        <a:t>0.56</a:t>
+                        <a:rPr lang="en-GB" dirty="0"/>
+                        <a:t>0.35</a:t>
                       </a:r>
                     </a:p>
                   </a:txBody>
@@ -14267,25 +14402,7 @@
               <a:buNone/>
             </a:pPr>
             <a:r>
-              <a:rPr lang="en-GB" b="1">
-                <a:solidFill>
-                  <a:srgbClr val="7030A0"/>
-                </a:solidFill>
-              </a:rPr>
-              <a:t>Greedy sampling</a:t>
-            </a:r>
-            <a:r>
-              <a:rPr lang="en-GB"/>
-              <a:t> Pick the top score</a:t>
-            </a:r>
-            <a:endParaRPr lang="en-US"/>
-          </a:p>
-          <a:p>
-            <a:pPr marL="0" indent="0">
-              <a:buNone/>
-            </a:pPr>
-            <a:r>
-              <a:rPr lang="en-GB" b="1">
+              <a:rPr lang="en-GB" b="1" dirty="0">
                 <a:solidFill>
                   <a:srgbClr val="7030A0"/>
                 </a:solidFill>
@@ -14293,7 +14410,7 @@
               <a:t>Top-p </a:t>
             </a:r>
             <a:r>
-              <a:rPr lang="en-GB">
+              <a:rPr lang="en-GB" dirty="0">
                 <a:solidFill>
                   <a:srgbClr val="000000"/>
                 </a:solidFill>
@@ -14308,7 +14425,7 @@
               <a:buNone/>
             </a:pPr>
             <a:r>
-              <a:rPr lang="en-GB" b="1">
+              <a:rPr lang="en-GB" b="1" dirty="0">
                 <a:solidFill>
                   <a:srgbClr val="7030A0"/>
                 </a:solidFill>
@@ -14316,11 +14433,11 @@
               <a:t>Top-k</a:t>
             </a:r>
             <a:r>
-              <a:rPr lang="en-GB"/>
+              <a:rPr lang="en-GB" dirty="0"/>
               <a:t> </a:t>
             </a:r>
             <a:r>
-              <a:rPr lang="en-GB">
+              <a:rPr lang="en-GB" dirty="0">
                 <a:solidFill>
                   <a:srgbClr val="000000"/>
                 </a:solidFill>
@@ -14334,18 +14451,50 @@
             <a:pPr marL="0" indent="0">
               <a:buNone/>
             </a:pPr>
-            <a:endParaRPr lang="en-GB">
+            <a:endParaRPr lang="en-GB" dirty="0">
               <a:solidFill>
                 <a:srgbClr val="000000"/>
               </a:solidFill>
             </a:endParaRPr>
           </a:p>
           <a:p>
+            <a:pPr marL="0" indent="0">
+              <a:buNone/>
+            </a:pPr>
+            <a:endParaRPr lang="en-GB" dirty="0">
+              <a:solidFill>
+                <a:srgbClr val="000000"/>
+              </a:solidFill>
+            </a:endParaRPr>
+          </a:p>
+          <a:p>
+            <a:pPr marL="0" indent="0">
+              <a:buNone/>
+            </a:pPr>
+            <a:r>
+              <a:rPr lang="en-GB" b="1" dirty="0">
+                <a:solidFill>
+                  <a:srgbClr val="7030A0"/>
+                </a:solidFill>
+              </a:rPr>
+              <a:t>Greedy sampling</a:t>
+            </a:r>
+            <a:r>
+              <a:rPr lang="en-GB" dirty="0"/>
+              <a:t> Pick the top score</a:t>
+            </a:r>
+            <a:endParaRPr lang="en-GB" dirty="0">
+              <a:solidFill>
+                <a:srgbClr val="000000"/>
+              </a:solidFill>
+            </a:endParaRPr>
+          </a:p>
+          <a:p>
             <a:pPr marL="0" indent="0" algn="ctr">
               <a:buNone/>
             </a:pPr>
             <a:r>
-              <a:rPr lang="en-GB" i="1">
+              <a:rPr lang="en-GB" i="1" dirty="0">
                 <a:solidFill>
                   <a:srgbClr val="000000"/>
                 </a:solidFill>
@@ -14499,7 +14648,7 @@
                                         <p:tgtEl>
                                           <p:spTgt spid="3">
                                             <p:txEl>
-                                              <p:pRg st="2" end="2"/>
+                                              <p:pRg st="4" end="4"/>
                                             </p:txEl>
                                           </p:spTgt>
                                         </p:tgtEl>
@@ -14548,7 +14697,7 @@
                                         <p:tgtEl>
                                           <p:spTgt spid="3">
                                             <p:txEl>
-                                              <p:pRg st="4" end="4"/>
+                                              <p:pRg st="5" end="5"/>
                                             </p:txEl>
                                           </p:spTgt>
                                         </p:tgtEl>
@@ -14591,7 +14740,7 @@
       </p:par>
     </p:tnLst>
     <p:bldLst>
-      <p:bldP spid="3" grpId="0" build="p"/>
+      <p:bldP spid="3" grpId="0" uiExpand="1" build="p"/>
     </p:bldLst>
   </p:timing>
 </p:sld>
@@ -15358,7 +15507,7 @@
           <p:nvPr/>
         </p:nvPicPr>
         <p:blipFill>
-          <a:blip r:embed="rId2"/>
+          <a:blip r:embed="rId3"/>
           <a:stretch>
             <a:fillRect/>
           </a:stretch>
@@ -16880,8 +17029,8 @@
           </a:fontRef>
         </p:style>
       </p:cxnSp>
-      <mc:AlternateContent xmlns:mc="http://schemas.openxmlformats.org/markup-compatibility/2006">
-        <mc:Choice xmlns:a14="http://schemas.microsoft.com/office/drawing/2010/main" Requires="a14">
+      <mc:AlternateContent xmlns:mc="http://schemas.openxmlformats.org/markup-compatibility/2006" xmlns:a14="http://schemas.microsoft.com/office/drawing/2010/main">
+        <mc:Choice Requires="a14">
           <p:sp>
             <p:nvSpPr>
               <p:cNvPr id="13" name="TextBox 12">
@@ -16932,7 +17081,7 @@
             </p:txBody>
           </p:sp>
         </mc:Choice>
-        <mc:Fallback>
+        <mc:Fallback xmlns="">
           <p:sp>
             <p:nvSpPr>
               <p:cNvPr id="13" name="TextBox 12">

--- a/slides/6-sampling.pptx
+++ b/slides/6-sampling.pptx
@@ -904,6 +904,60 @@
         <p:txBody>
           <a:bodyPr/>
           <a:lstStyle/>
+          <a:p>
+            <a:r>
+              <a:rPr lang="en-US" dirty="0"/>
+              <a:t>[TIMINGS]</a:t>
+            </a:r>
+          </a:p>
+          <a:p>
+            <a:endParaRPr lang="en-US" dirty="0"/>
+          </a:p>
+          <a:p>
+            <a:r>
+              <a:rPr lang="en-US" dirty="0"/>
+              <a:t>Practice: 45m</a:t>
+            </a:r>
+          </a:p>
+          <a:p>
+            <a:r>
+              <a:rPr lang="en-US" dirty="0"/>
+              <a:t>Target: 45m</a:t>
+            </a:r>
+          </a:p>
+          <a:p>
+            <a:endParaRPr lang="en-US" dirty="0"/>
+          </a:p>
+          <a:p>
+            <a:r>
+              <a:rPr lang="en-US" dirty="0"/>
+              <a:t>Start time: 14:45</a:t>
+            </a:r>
+          </a:p>
+          <a:p>
+            <a:r>
+              <a:rPr lang="en-US" dirty="0"/>
+              <a:t>[30m break @ 15:00 – 15:30]</a:t>
+            </a:r>
+          </a:p>
+          <a:p>
+            <a:r>
+              <a:rPr lang="en-US" dirty="0"/>
+              <a:t>End time: 16:00</a:t>
+            </a:r>
+          </a:p>
+          <a:p>
+            <a:endParaRPr lang="en-US" dirty="0"/>
+          </a:p>
+          <a:p>
+            <a:r>
+              <a:rPr lang="en-US" dirty="0"/>
+              <a:t>---</a:t>
+            </a:r>
+          </a:p>
+          <a:p>
+            <a:endParaRPr lang="en-US" dirty="0"/>
+          </a:p>
           <a:p>
             <a:r>
               <a:rPr lang="en-US" dirty="0"/>
